--- a/it/slides/03-Architettura_dei_Calcolatori-Storia_della_Computazione-Lab.pptx
+++ b/it/slides/03-Architettura_dei_Calcolatori-Storia_della_Computazione-Lab.pptx
@@ -119,13 +119,13 @@
   <p:extLst>
     <p:ext uri="{521415D9-36F7-43E2-AB2F-B90AF26B5E84}">
       <p14:sectionLst xmlns:p14="http://schemas.microsoft.com/office/powerpoint/2010/main">
-        <p14:section name="Apertura" id="{5b46dd22-c33c-5274-21b4-1d8332b2cade}">
+        <p14:section name="Apertura" id="{10f28e77-517c-cf96-c38b-9179e5fc9a66}">
           <p14:sldIdLst>
             <p14:sldId id="256"/>
             <p14:sldId id="257"/>
           </p14:sldIdLst>
         </p14:section>
-        <p14:section name="Il programma completo" id="{e83fcc78-2636-c7a0-e2f3-fa73adecb3b0}">
+        <p14:section name="Il programma completo" id="{3085b1db-e7fa-b36e-8820-6b342d746c65}">
           <p14:sldIdLst>
             <p14:sldId id="258"/>
             <p14:sldId id="259"/>
@@ -134,7 +134,7 @@
             <p14:sldId id="262"/>
           </p14:sldIdLst>
         </p14:section>
-        <p14:section name="Eseguire e provare" id="{f4b86deb-dd15-14a6-a084-70f35d9fbb48}">
+        <p14:section name="Eseguire e provare" id="{4e040f74-6c02-0430-c36b-5586e04b28ae}">
           <p14:sldIdLst>
             <p14:sldId id="263"/>
             <p14:sldId id="264"/>
@@ -143,7 +143,7 @@
             <p14:sldId id="267"/>
           </p14:sldIdLst>
         </p14:section>
-        <p14:section name="Esercizi" id="{e2560f17-78f1-52e0-c76d-651d77bb73d9}">
+        <p14:section name="Esercizi" id="{9329c6eb-c0b4-8677-49dd-411e1b31c9de}">
           <p14:sldIdLst>
             <p14:sldId id="268"/>
           </p14:sldIdLst>

--- a/it/slides/03-Architettura_dei_Calcolatori-Storia_della_Computazione-Lab.pptx
+++ b/it/slides/03-Architettura_dei_Calcolatori-Storia_della_Computazione-Lab.pptx
@@ -119,13 +119,13 @@
   <p:extLst>
     <p:ext uri="{521415D9-36F7-43E2-AB2F-B90AF26B5E84}">
       <p14:sectionLst xmlns:p14="http://schemas.microsoft.com/office/powerpoint/2010/main">
-        <p14:section name="Apertura" id="{10f28e77-517c-cf96-c38b-9179e5fc9a66}">
+        <p14:section name="Apertura" id="{f7f9099e-30c8-6b35-8694-b45875a64d36}">
           <p14:sldIdLst>
             <p14:sldId id="256"/>
             <p14:sldId id="257"/>
           </p14:sldIdLst>
         </p14:section>
-        <p14:section name="Il programma completo" id="{3085b1db-e7fa-b36e-8820-6b342d746c65}">
+        <p14:section name="Il programma completo" id="{aecc838b-2e99-f181-8126-affe305e3e95}">
           <p14:sldIdLst>
             <p14:sldId id="258"/>
             <p14:sldId id="259"/>
@@ -134,7 +134,7 @@
             <p14:sldId id="262"/>
           </p14:sldIdLst>
         </p14:section>
-        <p14:section name="Eseguire e provare" id="{4e040f74-6c02-0430-c36b-5586e04b28ae}">
+        <p14:section name="Eseguire e provare" id="{2efa075e-c048-1221-cd24-258c11157d0a}">
           <p14:sldIdLst>
             <p14:sldId id="263"/>
             <p14:sldId id="264"/>
@@ -143,7 +143,7 @@
             <p14:sldId id="267"/>
           </p14:sldIdLst>
         </p14:section>
-        <p14:section name="Esercizi" id="{9329c6eb-c0b4-8677-49dd-411e1b31c9de}">
+        <p14:section name="Esercizi" id="{56172398-0268-2e8d-0f61-541b553bf08e}">
           <p14:sldIdLst>
             <p14:sldId id="268"/>
           </p14:sldIdLst>
@@ -554,7 +554,8 @@
               <a:rPr lang="en-US" dirty="0"/>
               <a:t>Questa è la presentazione del codice della Lezione 03. Mentre la presentazione della lezione sviluppa i concetti, questa raccoglie tutto ciò che si scrive e si esegue: ogni listato con il suo commento, il programma completo della lezione, il risultato che deve produrre, e la procedura per provarlo su ciascuno dei tre host. Le due presentazioni vanno lette insieme: i concetti spiegano il codice, e il codice dà ai concetti una conseguenza osservabile.
 Stato di apprendimento: DA COMPRENDERE OGGI, alla fine di questa lezione lo spiegate, lo seguite passo passo e lo applicate da soli; DA UTILIZZARE OGGI, oggi seguite e usate la ricetta; come funziona dentro si spiega più avanti, o non fa parte del corso; DA COMPRENDERE PIÙ AVANTI, riconoscete il nome e lo scopo; lo spiega una lezione successiva. Una slide senza etichetta è contesto: una storia, un esempio, una domanda, un esercizio.
-Stato di apprendimento di questa lezione. DA COMPRENDERE OGGI: che cos'è l'informatica; l'architettura di von Neumann; RISC e un ISA aperto. DA UTILIZZARE OGGI: il programma completo, gli strumenti di PRG32 (si usa, non si studia, in questo corso). DA COMPRENDERE PIÙ AVANTI: l'algebra di Boole (Lezione 08). Una slide senza etichetta è contesto: una storia, un esempio, una domanda, un esercizio.</a:t>
+Stato di apprendimento di questa lezione. DA COMPRENDERE OGGI: che cos'è l'informatica; l'architettura di von Neumann; RISC e un ISA aperto. DA UTILIZZARE OGGI: il programma completo, gli strumenti di PRG32 (si usa, non si studia, in questo corso). DA COMPRENDERE PIÙ AVANTI: l'algebra di Boole (Lezione 08). Una slide senza etichetta è contesto: una storia, un esempio, una domanda, un esercizio.
+Percorso. I risultati di oggi: (1) definire l'informatica e spiegare perché non riguarda solo i computer; (2) nominare le unità dell'architettura di von Neumann e la sua idea del programma memorizzato; (3) dire che cosa distingue RISC da CISC e perché RISC-V è aperto. Si appoggia su: solo ciò che ha preparato la Lezione 01. Prossimo passo: Lezione 04, Rappresentare l'informazione digitale.</a:t>
             </a:r>
             <a:endParaRPr lang="en-US" dirty="0"/>
           </a:p>
